--- a/slides/04-2-BridgeCrossing.pptx
+++ b/slides/04-2-BridgeCrossing.pptx
@@ -207,7 +207,7 @@
           <a:p>
             <a:fld id="{C5B45307-6ED4-B142-BD64-10F739779302}" type="datetimeFigureOut">
               <a:rPr lang="en-US" smtClean="0"/>
-              <a:t>8/27/25</a:t>
+              <a:t>10/7/25</a:t>
             </a:fld>
             <a:endParaRPr lang="en-US"/>
           </a:p>
@@ -615,7 +615,7 @@
           <a:noFill/>
           <a:extLst>
             <a:ext uri="{909E8E84-426E-40dd-AFC4-6F175D3DCCD1}">
-              <a14:hiddenFill xmlns:a14="http://schemas.microsoft.com/office/drawing/2010/main" xmlns="">
+              <a14:hiddenFill xmlns="" xmlns:a14="http://schemas.microsoft.com/office/drawing/2010/main">
                 <a:solidFill>
                   <a:srgbClr val="FFFFFF"/>
                 </a:solidFill>
@@ -674,7 +674,7 @@
             </a:ln>
             <a:extLst>
               <a:ext uri="{91240B29-F687-4f45-9708-019B960494DF}">
-                <a14:hiddenLine xmlns:a14="http://schemas.microsoft.com/office/drawing/2010/main" xmlns="" w="9525">
+                <a14:hiddenLine xmlns="" xmlns:a14="http://schemas.microsoft.com/office/drawing/2010/main" w="9525">
                   <a:solidFill>
                     <a:srgbClr val="000000"/>
                   </a:solidFill>
@@ -764,7 +764,7 @@
             </a:ln>
             <a:extLst>
               <a:ext uri="{91240B29-F687-4f45-9708-019B960494DF}">
-                <a14:hiddenLine xmlns:a14="http://schemas.microsoft.com/office/drawing/2010/main" xmlns="" w="9525">
+                <a14:hiddenLine xmlns="" xmlns:a14="http://schemas.microsoft.com/office/drawing/2010/main" w="9525">
                   <a:solidFill>
                     <a:srgbClr val="000000"/>
                   </a:solidFill>
@@ -854,7 +854,7 @@
             </a:ln>
             <a:extLst>
               <a:ext uri="{91240B29-F687-4f45-9708-019B960494DF}">
-                <a14:hiddenLine xmlns:a14="http://schemas.microsoft.com/office/drawing/2010/main" xmlns="" w="9525">
+                <a14:hiddenLine xmlns="" xmlns:a14="http://schemas.microsoft.com/office/drawing/2010/main" w="9525">
                   <a:solidFill>
                     <a:srgbClr val="000000"/>
                   </a:solidFill>
@@ -888,7 +888,7 @@
             </a:ln>
             <a:extLst>
               <a:ext uri="{91240B29-F687-4f45-9708-019B960494DF}">
-                <a14:hiddenLine xmlns:a14="http://schemas.microsoft.com/office/drawing/2010/main" xmlns="" w="9525">
+                <a14:hiddenLine xmlns="" xmlns:a14="http://schemas.microsoft.com/office/drawing/2010/main" w="9525">
                   <a:solidFill>
                     <a:srgbClr val="000000"/>
                   </a:solidFill>
@@ -978,7 +978,7 @@
             </a:ln>
             <a:extLst>
               <a:ext uri="{91240B29-F687-4f45-9708-019B960494DF}">
-                <a14:hiddenLine xmlns:a14="http://schemas.microsoft.com/office/drawing/2010/main" xmlns="" w="9525">
+                <a14:hiddenLine xmlns="" xmlns:a14="http://schemas.microsoft.com/office/drawing/2010/main" w="9525">
                   <a:solidFill>
                     <a:srgbClr val="000000"/>
                   </a:solidFill>
@@ -1040,7 +1040,7 @@
             </a:ln>
             <a:extLst>
               <a:ext uri="{91240B29-F687-4f45-9708-019B960494DF}">
-                <a14:hiddenLine xmlns:a14="http://schemas.microsoft.com/office/drawing/2010/main" xmlns="" w="9525">
+                <a14:hiddenLine xmlns="" xmlns:a14="http://schemas.microsoft.com/office/drawing/2010/main" w="9525">
                   <a:solidFill>
                     <a:srgbClr val="000000"/>
                   </a:solidFill>
@@ -1102,7 +1102,7 @@
             </a:ln>
             <a:extLst>
               <a:ext uri="{91240B29-F687-4f45-9708-019B960494DF}">
-                <a14:hiddenLine xmlns:a14="http://schemas.microsoft.com/office/drawing/2010/main" xmlns="" w="9525">
+                <a14:hiddenLine xmlns="" xmlns:a14="http://schemas.microsoft.com/office/drawing/2010/main" w="9525">
                   <a:solidFill>
                     <a:srgbClr val="000000"/>
                   </a:solidFill>
@@ -1192,7 +1192,7 @@
             </a:ln>
             <a:extLst>
               <a:ext uri="{91240B29-F687-4f45-9708-019B960494DF}">
-                <a14:hiddenLine xmlns:a14="http://schemas.microsoft.com/office/drawing/2010/main" xmlns="" w="9525">
+                <a14:hiddenLine xmlns="" xmlns:a14="http://schemas.microsoft.com/office/drawing/2010/main" w="9525">
                   <a:solidFill>
                     <a:srgbClr val="000000"/>
                   </a:solidFill>
@@ -1254,7 +1254,7 @@
             </a:ln>
             <a:extLst>
               <a:ext uri="{91240B29-F687-4f45-9708-019B960494DF}">
-                <a14:hiddenLine xmlns:a14="http://schemas.microsoft.com/office/drawing/2010/main" xmlns="" w="9525">
+                <a14:hiddenLine xmlns="" xmlns:a14="http://schemas.microsoft.com/office/drawing/2010/main" w="9525">
                   <a:solidFill>
                     <a:srgbClr val="000000"/>
                   </a:solidFill>
@@ -1316,7 +1316,7 @@
             </a:ln>
             <a:extLst>
               <a:ext uri="{91240B29-F687-4f45-9708-019B960494DF}">
-                <a14:hiddenLine xmlns:a14="http://schemas.microsoft.com/office/drawing/2010/main" xmlns="" w="9525">
+                <a14:hiddenLine xmlns="" xmlns:a14="http://schemas.microsoft.com/office/drawing/2010/main" w="9525">
                   <a:solidFill>
                     <a:srgbClr val="000000"/>
                   </a:solidFill>
@@ -1406,7 +1406,7 @@
             </a:ln>
             <a:extLst>
               <a:ext uri="{91240B29-F687-4f45-9708-019B960494DF}">
-                <a14:hiddenLine xmlns:a14="http://schemas.microsoft.com/office/drawing/2010/main" xmlns="" w="9525">
+                <a14:hiddenLine xmlns="" xmlns:a14="http://schemas.microsoft.com/office/drawing/2010/main" w="9525">
                   <a:solidFill>
                     <a:srgbClr val="000000"/>
                   </a:solidFill>
@@ -1496,7 +1496,7 @@
             </a:ln>
             <a:extLst>
               <a:ext uri="{91240B29-F687-4f45-9708-019B960494DF}">
-                <a14:hiddenLine xmlns:a14="http://schemas.microsoft.com/office/drawing/2010/main" xmlns="" w="9525">
+                <a14:hiddenLine xmlns="" xmlns:a14="http://schemas.microsoft.com/office/drawing/2010/main" w="9525">
                   <a:solidFill>
                     <a:srgbClr val="000000"/>
                   </a:solidFill>
@@ -1558,7 +1558,7 @@
             </a:ln>
             <a:extLst>
               <a:ext uri="{91240B29-F687-4f45-9708-019B960494DF}">
-                <a14:hiddenLine xmlns:a14="http://schemas.microsoft.com/office/drawing/2010/main" xmlns="" w="9525">
+                <a14:hiddenLine xmlns="" xmlns:a14="http://schemas.microsoft.com/office/drawing/2010/main" w="9525">
                   <a:solidFill>
                     <a:srgbClr val="000000"/>
                   </a:solidFill>
@@ -1668,7 +1668,7 @@
             </a:ln>
             <a:extLst>
               <a:ext uri="{91240B29-F687-4f45-9708-019B960494DF}">
-                <a14:hiddenLine xmlns:a14="http://schemas.microsoft.com/office/drawing/2010/main" xmlns="" w="9525">
+                <a14:hiddenLine xmlns="" xmlns:a14="http://schemas.microsoft.com/office/drawing/2010/main" w="9525">
                   <a:solidFill>
                     <a:srgbClr val="000000"/>
                   </a:solidFill>
@@ -1730,7 +1730,7 @@
             </a:ln>
             <a:extLst>
               <a:ext uri="{91240B29-F687-4f45-9708-019B960494DF}">
-                <a14:hiddenLine xmlns:a14="http://schemas.microsoft.com/office/drawing/2010/main" xmlns="" w="9525">
+                <a14:hiddenLine xmlns="" xmlns:a14="http://schemas.microsoft.com/office/drawing/2010/main" w="9525">
                   <a:solidFill>
                     <a:srgbClr val="000000"/>
                   </a:solidFill>
@@ -1820,7 +1820,7 @@
             </a:ln>
             <a:extLst>
               <a:ext uri="{91240B29-F687-4f45-9708-019B960494DF}">
-                <a14:hiddenLine xmlns:a14="http://schemas.microsoft.com/office/drawing/2010/main" xmlns="" w="9525">
+                <a14:hiddenLine xmlns="" xmlns:a14="http://schemas.microsoft.com/office/drawing/2010/main" w="9525">
                   <a:solidFill>
                     <a:srgbClr val="000000"/>
                   </a:solidFill>
@@ -1910,7 +1910,7 @@
             </a:ln>
             <a:extLst>
               <a:ext uri="{91240B29-F687-4f45-9708-019B960494DF}">
-                <a14:hiddenLine xmlns:a14="http://schemas.microsoft.com/office/drawing/2010/main" xmlns="" w="9525">
+                <a14:hiddenLine xmlns="" xmlns:a14="http://schemas.microsoft.com/office/drawing/2010/main" w="9525">
                   <a:solidFill>
                     <a:srgbClr val="000000"/>
                   </a:solidFill>
@@ -1972,7 +1972,7 @@
             </a:ln>
             <a:extLst>
               <a:ext uri="{91240B29-F687-4f45-9708-019B960494DF}">
-                <a14:hiddenLine xmlns:a14="http://schemas.microsoft.com/office/drawing/2010/main" xmlns="" w="9525">
+                <a14:hiddenLine xmlns="" xmlns:a14="http://schemas.microsoft.com/office/drawing/2010/main" w="9525">
                   <a:solidFill>
                     <a:srgbClr val="000000"/>
                   </a:solidFill>
@@ -2062,7 +2062,7 @@
             </a:ln>
             <a:extLst>
               <a:ext uri="{91240B29-F687-4f45-9708-019B960494DF}">
-                <a14:hiddenLine xmlns:a14="http://schemas.microsoft.com/office/drawing/2010/main" xmlns="" w="9525">
+                <a14:hiddenLine xmlns="" xmlns:a14="http://schemas.microsoft.com/office/drawing/2010/main" w="9525">
                   <a:solidFill>
                     <a:srgbClr val="000000"/>
                   </a:solidFill>
@@ -2152,7 +2152,7 @@
             </a:ln>
             <a:extLst>
               <a:ext uri="{91240B29-F687-4f45-9708-019B960494DF}">
-                <a14:hiddenLine xmlns:a14="http://schemas.microsoft.com/office/drawing/2010/main" xmlns="" w="9525">
+                <a14:hiddenLine xmlns="" xmlns:a14="http://schemas.microsoft.com/office/drawing/2010/main" w="9525">
                   <a:solidFill>
                     <a:srgbClr val="000000"/>
                   </a:solidFill>
@@ -2208,7 +2208,7 @@
             </a:ln>
             <a:extLst>
               <a:ext uri="{91240B29-F687-4f45-9708-019B960494DF}">
-                <a14:hiddenLine xmlns:a14="http://schemas.microsoft.com/office/drawing/2010/main" xmlns="" w="9525">
+                <a14:hiddenLine xmlns="" xmlns:a14="http://schemas.microsoft.com/office/drawing/2010/main" w="9525">
                   <a:solidFill>
                     <a:srgbClr val="000000"/>
                   </a:solidFill>
@@ -2298,7 +2298,7 @@
             </a:ln>
             <a:extLst>
               <a:ext uri="{91240B29-F687-4f45-9708-019B960494DF}">
-                <a14:hiddenLine xmlns:a14="http://schemas.microsoft.com/office/drawing/2010/main" xmlns="" w="9525">
+                <a14:hiddenLine xmlns="" xmlns:a14="http://schemas.microsoft.com/office/drawing/2010/main" w="9525">
                   <a:solidFill>
                     <a:srgbClr val="000000"/>
                   </a:solidFill>
@@ -2354,7 +2354,7 @@
             </a:ln>
             <a:extLst>
               <a:ext uri="{91240B29-F687-4f45-9708-019B960494DF}">
-                <a14:hiddenLine xmlns:a14="http://schemas.microsoft.com/office/drawing/2010/main" xmlns="" w="9525">
+                <a14:hiddenLine xmlns="" xmlns:a14="http://schemas.microsoft.com/office/drawing/2010/main" w="9525">
                   <a:solidFill>
                     <a:srgbClr val="000000"/>
                   </a:solidFill>
@@ -2444,7 +2444,7 @@
             </a:ln>
             <a:extLst>
               <a:ext uri="{91240B29-F687-4f45-9708-019B960494DF}">
-                <a14:hiddenLine xmlns:a14="http://schemas.microsoft.com/office/drawing/2010/main" xmlns="" w="9525">
+                <a14:hiddenLine xmlns="" xmlns:a14="http://schemas.microsoft.com/office/drawing/2010/main" w="9525">
                   <a:solidFill>
                     <a:srgbClr val="000000"/>
                   </a:solidFill>
@@ -2512,7 +2512,7 @@
             </a:ln>
             <a:extLst>
               <a:ext uri="{91240B29-F687-4f45-9708-019B960494DF}">
-                <a14:hiddenLine xmlns:a14="http://schemas.microsoft.com/office/drawing/2010/main" xmlns="" w="9525">
+                <a14:hiddenLine xmlns="" xmlns:a14="http://schemas.microsoft.com/office/drawing/2010/main" w="9525">
                   <a:solidFill>
                     <a:srgbClr val="000000"/>
                   </a:solidFill>
@@ -2602,7 +2602,7 @@
             </a:ln>
             <a:extLst>
               <a:ext uri="{91240B29-F687-4f45-9708-019B960494DF}">
-                <a14:hiddenLine xmlns:a14="http://schemas.microsoft.com/office/drawing/2010/main" xmlns="" w="9525">
+                <a14:hiddenLine xmlns="" xmlns:a14="http://schemas.microsoft.com/office/drawing/2010/main" w="9525">
                   <a:solidFill>
                     <a:srgbClr val="000000"/>
                   </a:solidFill>
@@ -2670,7 +2670,7 @@
             </a:ln>
             <a:extLst>
               <a:ext uri="{91240B29-F687-4f45-9708-019B960494DF}">
-                <a14:hiddenLine xmlns:a14="http://schemas.microsoft.com/office/drawing/2010/main" xmlns="" w="9525">
+                <a14:hiddenLine xmlns="" xmlns:a14="http://schemas.microsoft.com/office/drawing/2010/main" w="9525">
                   <a:solidFill>
                     <a:srgbClr val="000000"/>
                   </a:solidFill>
@@ -2760,7 +2760,7 @@
             </a:ln>
             <a:extLst>
               <a:ext uri="{91240B29-F687-4f45-9708-019B960494DF}">
-                <a14:hiddenLine xmlns:a14="http://schemas.microsoft.com/office/drawing/2010/main" xmlns="" w="9525">
+                <a14:hiddenLine xmlns="" xmlns:a14="http://schemas.microsoft.com/office/drawing/2010/main" w="9525">
                   <a:solidFill>
                     <a:srgbClr val="000000"/>
                   </a:solidFill>
@@ -2794,7 +2794,7 @@
             </a:ln>
             <a:extLst>
               <a:ext uri="{91240B29-F687-4f45-9708-019B960494DF}">
-                <a14:hiddenLine xmlns:a14="http://schemas.microsoft.com/office/drawing/2010/main" xmlns="" w="9525">
+                <a14:hiddenLine xmlns="" xmlns:a14="http://schemas.microsoft.com/office/drawing/2010/main" w="9525">
                   <a:solidFill>
                     <a:srgbClr val="000000"/>
                   </a:solidFill>
@@ -2884,7 +2884,7 @@
             </a:ln>
             <a:extLst>
               <a:ext uri="{91240B29-F687-4f45-9708-019B960494DF}">
-                <a14:hiddenLine xmlns:a14="http://schemas.microsoft.com/office/drawing/2010/main" xmlns="" w="9525">
+                <a14:hiddenLine xmlns="" xmlns:a14="http://schemas.microsoft.com/office/drawing/2010/main" w="9525">
                   <a:solidFill>
                     <a:srgbClr val="000000"/>
                   </a:solidFill>
@@ -2946,7 +2946,7 @@
             </a:ln>
             <a:extLst>
               <a:ext uri="{91240B29-F687-4f45-9708-019B960494DF}">
-                <a14:hiddenLine xmlns:a14="http://schemas.microsoft.com/office/drawing/2010/main" xmlns="" w="9525">
+                <a14:hiddenLine xmlns="" xmlns:a14="http://schemas.microsoft.com/office/drawing/2010/main" w="9525">
                   <a:solidFill>
                     <a:srgbClr val="000000"/>
                   </a:solidFill>
@@ -3008,7 +3008,7 @@
             </a:ln>
             <a:extLst>
               <a:ext uri="{91240B29-F687-4f45-9708-019B960494DF}">
-                <a14:hiddenLine xmlns:a14="http://schemas.microsoft.com/office/drawing/2010/main" xmlns="" w="9525">
+                <a14:hiddenLine xmlns="" xmlns:a14="http://schemas.microsoft.com/office/drawing/2010/main" w="9525">
                   <a:solidFill>
                     <a:srgbClr val="000000"/>
                   </a:solidFill>
@@ -3098,7 +3098,7 @@
             </a:ln>
             <a:extLst>
               <a:ext uri="{91240B29-F687-4f45-9708-019B960494DF}">
-                <a14:hiddenLine xmlns:a14="http://schemas.microsoft.com/office/drawing/2010/main" xmlns="" w="9525">
+                <a14:hiddenLine xmlns="" xmlns:a14="http://schemas.microsoft.com/office/drawing/2010/main" w="9525">
                   <a:solidFill>
                     <a:srgbClr val="000000"/>
                   </a:solidFill>
@@ -3166,7 +3166,7 @@
             </a:ln>
             <a:extLst>
               <a:ext uri="{91240B29-F687-4f45-9708-019B960494DF}">
-                <a14:hiddenLine xmlns:a14="http://schemas.microsoft.com/office/drawing/2010/main" xmlns="" w="9525">
+                <a14:hiddenLine xmlns="" xmlns:a14="http://schemas.microsoft.com/office/drawing/2010/main" w="9525">
                   <a:solidFill>
                     <a:srgbClr val="000000"/>
                   </a:solidFill>
@@ -3228,7 +3228,7 @@
             </a:ln>
             <a:extLst>
               <a:ext uri="{91240B29-F687-4f45-9708-019B960494DF}">
-                <a14:hiddenLine xmlns:a14="http://schemas.microsoft.com/office/drawing/2010/main" xmlns="" w="9525">
+                <a14:hiddenLine xmlns="" xmlns:a14="http://schemas.microsoft.com/office/drawing/2010/main" w="9525">
                   <a:solidFill>
                     <a:srgbClr val="000000"/>
                   </a:solidFill>
@@ -3318,7 +3318,7 @@
             </a:ln>
             <a:extLst>
               <a:ext uri="{91240B29-F687-4f45-9708-019B960494DF}">
-                <a14:hiddenLine xmlns:a14="http://schemas.microsoft.com/office/drawing/2010/main" xmlns="" w="9525">
+                <a14:hiddenLine xmlns="" xmlns:a14="http://schemas.microsoft.com/office/drawing/2010/main" w="9525">
                   <a:solidFill>
                     <a:srgbClr val="000000"/>
                   </a:solidFill>
@@ -3380,7 +3380,7 @@
             </a:ln>
             <a:extLst>
               <a:ext uri="{91240B29-F687-4f45-9708-019B960494DF}">
-                <a14:hiddenLine xmlns:a14="http://schemas.microsoft.com/office/drawing/2010/main" xmlns="" w="9525">
+                <a14:hiddenLine xmlns="" xmlns:a14="http://schemas.microsoft.com/office/drawing/2010/main" w="9525">
                   <a:solidFill>
                     <a:srgbClr val="000000"/>
                   </a:solidFill>
@@ -3470,7 +3470,7 @@
             </a:ln>
             <a:extLst>
               <a:ext uri="{91240B29-F687-4f45-9708-019B960494DF}">
-                <a14:hiddenLine xmlns:a14="http://schemas.microsoft.com/office/drawing/2010/main" xmlns="" w="9525">
+                <a14:hiddenLine xmlns="" xmlns:a14="http://schemas.microsoft.com/office/drawing/2010/main" w="9525">
                   <a:solidFill>
                     <a:srgbClr val="000000"/>
                   </a:solidFill>
@@ -3532,7 +3532,7 @@
             </a:ln>
             <a:extLst>
               <a:ext uri="{91240B29-F687-4f45-9708-019B960494DF}">
-                <a14:hiddenLine xmlns:a14="http://schemas.microsoft.com/office/drawing/2010/main" xmlns="" w="9525">
+                <a14:hiddenLine xmlns="" xmlns:a14="http://schemas.microsoft.com/office/drawing/2010/main" w="9525">
                   <a:solidFill>
                     <a:srgbClr val="000000"/>
                   </a:solidFill>
@@ -3622,7 +3622,7 @@
             </a:ln>
             <a:extLst>
               <a:ext uri="{91240B29-F687-4f45-9708-019B960494DF}">
-                <a14:hiddenLine xmlns:a14="http://schemas.microsoft.com/office/drawing/2010/main" xmlns="" w="9525">
+                <a14:hiddenLine xmlns="" xmlns:a14="http://schemas.microsoft.com/office/drawing/2010/main" w="9525">
                   <a:solidFill>
                     <a:srgbClr val="000000"/>
                   </a:solidFill>
@@ -3656,7 +3656,7 @@
             </a:ln>
             <a:extLst>
               <a:ext uri="{91240B29-F687-4f45-9708-019B960494DF}">
-                <a14:hiddenLine xmlns:a14="http://schemas.microsoft.com/office/drawing/2010/main" xmlns="" w="9525">
+                <a14:hiddenLine xmlns="" xmlns:a14="http://schemas.microsoft.com/office/drawing/2010/main" w="9525">
                   <a:solidFill>
                     <a:srgbClr val="000000"/>
                   </a:solidFill>
@@ -3721,7 +3721,7 @@
             </a:ln>
             <a:extLst>
               <a:ext uri="{91240B29-F687-4f45-9708-019B960494DF}">
-                <a14:hiddenLine xmlns:a14="http://schemas.microsoft.com/office/drawing/2010/main" xmlns="" w="9525">
+                <a14:hiddenLine xmlns="" xmlns:a14="http://schemas.microsoft.com/office/drawing/2010/main" w="9525">
                   <a:solidFill>
                     <a:srgbClr val="000000"/>
                   </a:solidFill>
@@ -3811,7 +3811,7 @@
             </a:ln>
             <a:extLst>
               <a:ext uri="{91240B29-F687-4f45-9708-019B960494DF}">
-                <a14:hiddenLine xmlns:a14="http://schemas.microsoft.com/office/drawing/2010/main" xmlns="" w="9525">
+                <a14:hiddenLine xmlns="" xmlns:a14="http://schemas.microsoft.com/office/drawing/2010/main" w="9525">
                   <a:solidFill>
                     <a:srgbClr val="000000"/>
                   </a:solidFill>
@@ -3873,7 +3873,7 @@
             </a:ln>
             <a:extLst>
               <a:ext uri="{91240B29-F687-4f45-9708-019B960494DF}">
-                <a14:hiddenLine xmlns:a14="http://schemas.microsoft.com/office/drawing/2010/main" xmlns="" w="9525">
+                <a14:hiddenLine xmlns="" xmlns:a14="http://schemas.microsoft.com/office/drawing/2010/main" w="9525">
                   <a:solidFill>
                     <a:srgbClr val="000000"/>
                   </a:solidFill>
@@ -3963,7 +3963,7 @@
             </a:ln>
             <a:extLst>
               <a:ext uri="{91240B29-F687-4f45-9708-019B960494DF}">
-                <a14:hiddenLine xmlns:a14="http://schemas.microsoft.com/office/drawing/2010/main" xmlns="" w="9525">
+                <a14:hiddenLine xmlns="" xmlns:a14="http://schemas.microsoft.com/office/drawing/2010/main" w="9525">
                   <a:solidFill>
                     <a:srgbClr val="000000"/>
                   </a:solidFill>
@@ -4053,7 +4053,7 @@
             </a:ln>
             <a:extLst>
               <a:ext uri="{91240B29-F687-4f45-9708-019B960494DF}">
-                <a14:hiddenLine xmlns:a14="http://schemas.microsoft.com/office/drawing/2010/main" xmlns="" w="9525">
+                <a14:hiddenLine xmlns="" xmlns:a14="http://schemas.microsoft.com/office/drawing/2010/main" w="9525">
                   <a:solidFill>
                     <a:srgbClr val="000000"/>
                   </a:solidFill>
@@ -4118,7 +4118,7 @@
             </a:ln>
             <a:extLst>
               <a:ext uri="{91240B29-F687-4f45-9708-019B960494DF}">
-                <a14:hiddenLine xmlns:a14="http://schemas.microsoft.com/office/drawing/2010/main" xmlns="" w="9525">
+                <a14:hiddenLine xmlns="" xmlns:a14="http://schemas.microsoft.com/office/drawing/2010/main" w="9525">
                   <a:solidFill>
                     <a:srgbClr val="000000"/>
                   </a:solidFill>
@@ -4180,7 +4180,7 @@
             </a:ln>
             <a:extLst>
               <a:ext uri="{91240B29-F687-4f45-9708-019B960494DF}">
-                <a14:hiddenLine xmlns:a14="http://schemas.microsoft.com/office/drawing/2010/main" xmlns="" w="9525">
+                <a14:hiddenLine xmlns="" xmlns:a14="http://schemas.microsoft.com/office/drawing/2010/main" w="9525">
                   <a:solidFill>
                     <a:srgbClr val="000000"/>
                   </a:solidFill>
@@ -4270,7 +4270,7 @@
             </a:ln>
             <a:extLst>
               <a:ext uri="{91240B29-F687-4f45-9708-019B960494DF}">
-                <a14:hiddenLine xmlns:a14="http://schemas.microsoft.com/office/drawing/2010/main" xmlns="" w="9525">
+                <a14:hiddenLine xmlns="" xmlns:a14="http://schemas.microsoft.com/office/drawing/2010/main" w="9525">
                   <a:solidFill>
                     <a:srgbClr val="000000"/>
                   </a:solidFill>
@@ -4360,7 +4360,7 @@
             </a:ln>
             <a:extLst>
               <a:ext uri="{91240B29-F687-4f45-9708-019B960494DF}">
-                <a14:hiddenLine xmlns:a14="http://schemas.microsoft.com/office/drawing/2010/main" xmlns="" w="9525">
+                <a14:hiddenLine xmlns="" xmlns:a14="http://schemas.microsoft.com/office/drawing/2010/main" w="9525">
                   <a:solidFill>
                     <a:srgbClr val="000000"/>
                   </a:solidFill>
@@ -4422,7 +4422,7 @@
             </a:ln>
             <a:extLst>
               <a:ext uri="{91240B29-F687-4f45-9708-019B960494DF}">
-                <a14:hiddenLine xmlns:a14="http://schemas.microsoft.com/office/drawing/2010/main" xmlns="" w="9525">
+                <a14:hiddenLine xmlns="" xmlns:a14="http://schemas.microsoft.com/office/drawing/2010/main" w="9525">
                   <a:solidFill>
                     <a:srgbClr val="000000"/>
                   </a:solidFill>
@@ -4542,7 +4542,7 @@
             </a:ln>
             <a:extLst>
               <a:ext uri="{91240B29-F687-4f45-9708-019B960494DF}">
-                <a14:hiddenLine xmlns:a14="http://schemas.microsoft.com/office/drawing/2010/main" xmlns="" w="9525">
+                <a14:hiddenLine xmlns="" xmlns:a14="http://schemas.microsoft.com/office/drawing/2010/main" w="9525">
                   <a:solidFill>
                     <a:srgbClr val="000000"/>
                   </a:solidFill>
@@ -4610,7 +4610,7 @@
             </a:ln>
             <a:extLst>
               <a:ext uri="{91240B29-F687-4f45-9708-019B960494DF}">
-                <a14:hiddenLine xmlns:a14="http://schemas.microsoft.com/office/drawing/2010/main" xmlns="" w="9525">
+                <a14:hiddenLine xmlns="" xmlns:a14="http://schemas.microsoft.com/office/drawing/2010/main" w="9525">
                   <a:solidFill>
                     <a:srgbClr val="000000"/>
                   </a:solidFill>
@@ -4700,7 +4700,7 @@
             </a:ln>
             <a:extLst>
               <a:ext uri="{91240B29-F687-4f45-9708-019B960494DF}">
-                <a14:hiddenLine xmlns:a14="http://schemas.microsoft.com/office/drawing/2010/main" xmlns="" w="9525">
+                <a14:hiddenLine xmlns="" xmlns:a14="http://schemas.microsoft.com/office/drawing/2010/main" w="9525">
                   <a:solidFill>
                     <a:srgbClr val="000000"/>
                   </a:solidFill>
@@ -4840,7 +4840,7 @@
           <a:p>
             <a:fld id="{B48045D7-B751-224C-9817-C76A8A889B4C}" type="datetime1">
               <a:rPr lang="en-US" smtClean="0"/>
-              <a:t>8/27/25</a:t>
+              <a:t>10/7/25</a:t>
             </a:fld>
             <a:endParaRPr lang="en-US"/>
           </a:p>
@@ -5107,7 +5107,7 @@
           <a:p>
             <a:fld id="{534DA2E1-671B-A949-BBB6-1DA69C7F81F3}" type="datetime1">
               <a:rPr lang="en-US" smtClean="0"/>
-              <a:t>8/27/25</a:t>
+              <a:t>10/7/25</a:t>
             </a:fld>
             <a:endParaRPr lang="en-US"/>
           </a:p>
@@ -5303,7 +5303,7 @@
           <a:p>
             <a:fld id="{58F94E0B-AB0B-BB46-8080-53F5557CF9D8}" type="datetime1">
               <a:rPr lang="en-US" smtClean="0"/>
-              <a:t>8/27/25</a:t>
+              <a:t>10/7/25</a:t>
             </a:fld>
             <a:endParaRPr lang="en-US"/>
           </a:p>
@@ -5566,7 +5566,7 @@
           <a:p>
             <a:fld id="{F404EA87-730B-0C40-9B51-AAEE5691786B}" type="datetime1">
               <a:rPr lang="en-US" smtClean="0"/>
-              <a:t>8/27/25</a:t>
+              <a:t>10/7/25</a:t>
             </a:fld>
             <a:endParaRPr lang="en-US"/>
           </a:p>
@@ -6000,7 +6000,7 @@
           <a:p>
             <a:fld id="{1D69627E-2DA8-A54F-B7FC-D234AA6228A7}" type="datetime1">
               <a:rPr lang="en-US" smtClean="0"/>
-              <a:t>8/27/25</a:t>
+              <a:t>10/7/25</a:t>
             </a:fld>
             <a:endParaRPr lang="en-US"/>
           </a:p>
@@ -6546,7 +6546,7 @@
           <a:p>
             <a:fld id="{8E2DF2EE-2821-E944-A405-409F84498790}" type="datetime1">
               <a:rPr lang="en-US" smtClean="0"/>
-              <a:t>8/27/25</a:t>
+              <a:t>10/7/25</a:t>
             </a:fld>
             <a:endParaRPr lang="en-US"/>
           </a:p>
@@ -7266,7 +7266,7 @@
           <a:p>
             <a:fld id="{FBFED48C-178D-6C48-A28D-CE61B8FCDEA5}" type="datetime1">
               <a:rPr lang="en-US" smtClean="0"/>
-              <a:t>8/27/25</a:t>
+              <a:t>10/7/25</a:t>
             </a:fld>
             <a:endParaRPr lang="en-US"/>
           </a:p>
@@ -7436,7 +7436,7 @@
           <a:p>
             <a:fld id="{15E8512C-B8D0-534B-8846-67E695633960}" type="datetime1">
               <a:rPr lang="en-US" smtClean="0"/>
-              <a:t>8/27/25</a:t>
+              <a:t>10/7/25</a:t>
             </a:fld>
             <a:endParaRPr lang="en-US"/>
           </a:p>
@@ -7616,7 +7616,7 @@
           <a:p>
             <a:fld id="{630926FA-9E68-0444-9CEE-6A9CD63BA864}" type="datetime1">
               <a:rPr lang="en-US" smtClean="0"/>
-              <a:t>8/27/25</a:t>
+              <a:t>10/7/25</a:t>
             </a:fld>
             <a:endParaRPr lang="en-US"/>
           </a:p>
@@ -7786,7 +7786,7 @@
           <a:p>
             <a:fld id="{B06F7843-7FAF-F449-84DD-0D90B0DB289C}" type="datetime1">
               <a:rPr lang="en-US" smtClean="0"/>
-              <a:t>8/27/25</a:t>
+              <a:t>10/7/25</a:t>
             </a:fld>
             <a:endParaRPr lang="en-US"/>
           </a:p>
@@ -8036,7 +8036,7 @@
           <a:p>
             <a:fld id="{593B4C15-52EC-D34A-A2DC-E1CE317C7241}" type="datetime1">
               <a:rPr lang="en-US" smtClean="0"/>
-              <a:t>8/27/25</a:t>
+              <a:t>10/7/25</a:t>
             </a:fld>
             <a:endParaRPr lang="en-US"/>
           </a:p>
@@ -8268,7 +8268,7 @@
           <a:p>
             <a:fld id="{4DE4F480-1A0C-CA4D-80A0-B95EC1566657}" type="datetime1">
               <a:rPr lang="en-US" smtClean="0"/>
-              <a:t>8/27/25</a:t>
+              <a:t>10/7/25</a:t>
             </a:fld>
             <a:endParaRPr lang="en-US"/>
           </a:p>
@@ -8654,7 +8654,7 @@
           <a:p>
             <a:fld id="{56413EFB-4901-2D46-9BE2-44FA3B98A4F2}" type="datetime1">
               <a:rPr lang="en-US" smtClean="0"/>
-              <a:t>8/27/25</a:t>
+              <a:t>10/7/25</a:t>
             </a:fld>
             <a:endParaRPr lang="en-US"/>
           </a:p>
@@ -8777,7 +8777,7 @@
           <a:p>
             <a:fld id="{0C3ADAD8-4FA3-4348-96B8-BE1AE9EA54F1}" type="datetime1">
               <a:rPr lang="en-US" smtClean="0"/>
-              <a:t>8/27/25</a:t>
+              <a:t>10/7/25</a:t>
             </a:fld>
             <a:endParaRPr lang="en-US"/>
           </a:p>
@@ -8872,7 +8872,7 @@
           <a:p>
             <a:fld id="{985C4E78-2BE2-1646-B6E6-9ACCE6EC03D9}" type="datetime1">
               <a:rPr lang="en-US" smtClean="0"/>
-              <a:t>8/27/25</a:t>
+              <a:t>10/7/25</a:t>
             </a:fld>
             <a:endParaRPr lang="en-US"/>
           </a:p>
@@ -9121,7 +9121,7 @@
           <a:p>
             <a:fld id="{F35D3A48-D2F0-2A4C-8D22-3F7144D7EAEC}" type="datetime1">
               <a:rPr lang="en-US" smtClean="0"/>
-              <a:t>8/27/25</a:t>
+              <a:t>10/7/25</a:t>
             </a:fld>
             <a:endParaRPr lang="en-US"/>
           </a:p>
@@ -9406,7 +9406,7 @@
           <a:p>
             <a:fld id="{3BC25F75-49B6-A34C-9C8F-9A01A88D02E9}" type="datetime1">
               <a:rPr lang="en-US" smtClean="0"/>
-              <a:t>8/27/25</a:t>
+              <a:t>10/7/25</a:t>
             </a:fld>
             <a:endParaRPr lang="en-US"/>
           </a:p>
@@ -9529,7 +9529,7 @@
           <a:noFill/>
           <a:extLst>
             <a:ext uri="{909E8E84-426E-40dd-AFC4-6F175D3DCCD1}">
-              <a14:hiddenFill xmlns:a14="http://schemas.microsoft.com/office/drawing/2010/main" xmlns="">
+              <a14:hiddenFill xmlns="" xmlns:a14="http://schemas.microsoft.com/office/drawing/2010/main">
                 <a:solidFill>
                   <a:srgbClr val="FFFFFF"/>
                 </a:solidFill>
@@ -9603,7 +9603,7 @@
               </a:ln>
               <a:extLst>
                 <a:ext uri="{91240B29-F687-4f45-9708-019B960494DF}">
-                  <a14:hiddenLine xmlns:a14="http://schemas.microsoft.com/office/drawing/2010/main" xmlns="" w="9525">
+                  <a14:hiddenLine xmlns="" xmlns:a14="http://schemas.microsoft.com/office/drawing/2010/main" w="9525">
                     <a:solidFill>
                       <a:srgbClr val="000000"/>
                     </a:solidFill>
@@ -9693,7 +9693,7 @@
               </a:ln>
               <a:extLst>
                 <a:ext uri="{91240B29-F687-4f45-9708-019B960494DF}">
-                  <a14:hiddenLine xmlns:a14="http://schemas.microsoft.com/office/drawing/2010/main" xmlns="" w="9525">
+                  <a14:hiddenLine xmlns="" xmlns:a14="http://schemas.microsoft.com/office/drawing/2010/main" w="9525">
                     <a:solidFill>
                       <a:srgbClr val="000000"/>
                     </a:solidFill>
@@ -9783,7 +9783,7 @@
               </a:ln>
               <a:extLst>
                 <a:ext uri="{91240B29-F687-4f45-9708-019B960494DF}">
-                  <a14:hiddenLine xmlns:a14="http://schemas.microsoft.com/office/drawing/2010/main" xmlns="" w="9525">
+                  <a14:hiddenLine xmlns="" xmlns:a14="http://schemas.microsoft.com/office/drawing/2010/main" w="9525">
                     <a:solidFill>
                       <a:srgbClr val="000000"/>
                     </a:solidFill>
@@ -9845,7 +9845,7 @@
               </a:ln>
               <a:extLst>
                 <a:ext uri="{91240B29-F687-4f45-9708-019B960494DF}">
-                  <a14:hiddenLine xmlns:a14="http://schemas.microsoft.com/office/drawing/2010/main" xmlns="" w="9525">
+                  <a14:hiddenLine xmlns="" xmlns:a14="http://schemas.microsoft.com/office/drawing/2010/main" w="9525">
                     <a:solidFill>
                       <a:srgbClr val="000000"/>
                     </a:solidFill>
@@ -9935,7 +9935,7 @@
               </a:ln>
               <a:extLst>
                 <a:ext uri="{91240B29-F687-4f45-9708-019B960494DF}">
-                  <a14:hiddenLine xmlns:a14="http://schemas.microsoft.com/office/drawing/2010/main" xmlns="" w="9525">
+                  <a14:hiddenLine xmlns="" xmlns:a14="http://schemas.microsoft.com/office/drawing/2010/main" w="9525">
                     <a:solidFill>
                       <a:srgbClr val="000000"/>
                     </a:solidFill>
@@ -9997,7 +9997,7 @@
               </a:ln>
               <a:extLst>
                 <a:ext uri="{91240B29-F687-4f45-9708-019B960494DF}">
-                  <a14:hiddenLine xmlns:a14="http://schemas.microsoft.com/office/drawing/2010/main" xmlns="" w="9525">
+                  <a14:hiddenLine xmlns="" xmlns:a14="http://schemas.microsoft.com/office/drawing/2010/main" w="9525">
                     <a:solidFill>
                       <a:srgbClr val="000000"/>
                     </a:solidFill>
@@ -10059,7 +10059,7 @@
               </a:ln>
               <a:extLst>
                 <a:ext uri="{91240B29-F687-4f45-9708-019B960494DF}">
-                  <a14:hiddenLine xmlns:a14="http://schemas.microsoft.com/office/drawing/2010/main" xmlns="" w="9525">
+                  <a14:hiddenLine xmlns="" xmlns:a14="http://schemas.microsoft.com/office/drawing/2010/main" w="9525">
                     <a:solidFill>
                       <a:srgbClr val="000000"/>
                     </a:solidFill>
@@ -10149,7 +10149,7 @@
               </a:ln>
               <a:extLst>
                 <a:ext uri="{91240B29-F687-4f45-9708-019B960494DF}">
-                  <a14:hiddenLine xmlns:a14="http://schemas.microsoft.com/office/drawing/2010/main" xmlns="" w="9525">
+                  <a14:hiddenLine xmlns="" xmlns:a14="http://schemas.microsoft.com/office/drawing/2010/main" w="9525">
                     <a:solidFill>
                       <a:srgbClr val="000000"/>
                     </a:solidFill>
@@ -10239,7 +10239,7 @@
               </a:ln>
               <a:extLst>
                 <a:ext uri="{91240B29-F687-4f45-9708-019B960494DF}">
-                  <a14:hiddenLine xmlns:a14="http://schemas.microsoft.com/office/drawing/2010/main" xmlns="" w="9525">
+                  <a14:hiddenLine xmlns="" xmlns:a14="http://schemas.microsoft.com/office/drawing/2010/main" w="9525">
                     <a:solidFill>
                       <a:srgbClr val="000000"/>
                     </a:solidFill>
@@ -10301,7 +10301,7 @@
               </a:ln>
               <a:extLst>
                 <a:ext uri="{91240B29-F687-4f45-9708-019B960494DF}">
-                  <a14:hiddenLine xmlns:a14="http://schemas.microsoft.com/office/drawing/2010/main" xmlns="" w="9525">
+                  <a14:hiddenLine xmlns="" xmlns:a14="http://schemas.microsoft.com/office/drawing/2010/main" w="9525">
                     <a:solidFill>
                       <a:srgbClr val="000000"/>
                     </a:solidFill>
@@ -10411,7 +10411,7 @@
               </a:ln>
               <a:extLst>
                 <a:ext uri="{91240B29-F687-4f45-9708-019B960494DF}">
-                  <a14:hiddenLine xmlns:a14="http://schemas.microsoft.com/office/drawing/2010/main" xmlns="" w="9525">
+                  <a14:hiddenLine xmlns="" xmlns:a14="http://schemas.microsoft.com/office/drawing/2010/main" w="9525">
                     <a:solidFill>
                       <a:srgbClr val="000000"/>
                     </a:solidFill>
@@ -10495,7 +10495,7 @@
               </a:ln>
               <a:extLst>
                 <a:ext uri="{91240B29-F687-4f45-9708-019B960494DF}">
-                  <a14:hiddenLine xmlns:a14="http://schemas.microsoft.com/office/drawing/2010/main" xmlns="" w="9525">
+                  <a14:hiddenLine xmlns="" xmlns:a14="http://schemas.microsoft.com/office/drawing/2010/main" w="9525">
                     <a:solidFill>
                       <a:srgbClr val="000000"/>
                     </a:solidFill>
@@ -10557,7 +10557,7 @@
               </a:ln>
               <a:extLst>
                 <a:ext uri="{91240B29-F687-4f45-9708-019B960494DF}">
-                  <a14:hiddenLine xmlns:a14="http://schemas.microsoft.com/office/drawing/2010/main" xmlns="" w="9525">
+                  <a14:hiddenLine xmlns="" xmlns:a14="http://schemas.microsoft.com/office/drawing/2010/main" w="9525">
                     <a:solidFill>
                       <a:srgbClr val="000000"/>
                     </a:solidFill>
@@ -10619,7 +10619,7 @@
               </a:ln>
               <a:extLst>
                 <a:ext uri="{91240B29-F687-4f45-9708-019B960494DF}">
-                  <a14:hiddenLine xmlns:a14="http://schemas.microsoft.com/office/drawing/2010/main" xmlns="" w="9525">
+                  <a14:hiddenLine xmlns="" xmlns:a14="http://schemas.microsoft.com/office/drawing/2010/main" w="9525">
                     <a:solidFill>
                       <a:srgbClr val="000000"/>
                     </a:solidFill>
@@ -10709,7 +10709,7 @@
               </a:ln>
               <a:extLst>
                 <a:ext uri="{91240B29-F687-4f45-9708-019B960494DF}">
-                  <a14:hiddenLine xmlns:a14="http://schemas.microsoft.com/office/drawing/2010/main" xmlns="" w="9525">
+                  <a14:hiddenLine xmlns="" xmlns:a14="http://schemas.microsoft.com/office/drawing/2010/main" w="9525">
                     <a:solidFill>
                       <a:srgbClr val="000000"/>
                     </a:solidFill>
@@ -10743,7 +10743,7 @@
               </a:ln>
               <a:extLst>
                 <a:ext uri="{91240B29-F687-4f45-9708-019B960494DF}">
-                  <a14:hiddenLine xmlns:a14="http://schemas.microsoft.com/office/drawing/2010/main" xmlns="" w="9525">
+                  <a14:hiddenLine xmlns="" xmlns:a14="http://schemas.microsoft.com/office/drawing/2010/main" w="9525">
                     <a:solidFill>
                       <a:srgbClr val="000000"/>
                     </a:solidFill>
@@ -10808,7 +10808,7 @@
               </a:ln>
               <a:extLst>
                 <a:ext uri="{91240B29-F687-4f45-9708-019B960494DF}">
-                  <a14:hiddenLine xmlns:a14="http://schemas.microsoft.com/office/drawing/2010/main" xmlns="" w="9525">
+                  <a14:hiddenLine xmlns="" xmlns:a14="http://schemas.microsoft.com/office/drawing/2010/main" w="9525">
                     <a:solidFill>
                       <a:srgbClr val="000000"/>
                     </a:solidFill>
@@ -10898,7 +10898,7 @@
               </a:ln>
               <a:extLst>
                 <a:ext uri="{91240B29-F687-4f45-9708-019B960494DF}">
-                  <a14:hiddenLine xmlns:a14="http://schemas.microsoft.com/office/drawing/2010/main" xmlns="" w="9525">
+                  <a14:hiddenLine xmlns="" xmlns:a14="http://schemas.microsoft.com/office/drawing/2010/main" w="9525">
                     <a:solidFill>
                       <a:srgbClr val="000000"/>
                     </a:solidFill>
@@ -10960,7 +10960,7 @@
               </a:ln>
               <a:extLst>
                 <a:ext uri="{91240B29-F687-4f45-9708-019B960494DF}">
-                  <a14:hiddenLine xmlns:a14="http://schemas.microsoft.com/office/drawing/2010/main" xmlns="" w="9525">
+                  <a14:hiddenLine xmlns="" xmlns:a14="http://schemas.microsoft.com/office/drawing/2010/main" w="9525">
                     <a:solidFill>
                       <a:srgbClr val="000000"/>
                     </a:solidFill>
@@ -11050,7 +11050,7 @@
               </a:ln>
               <a:extLst>
                 <a:ext uri="{91240B29-F687-4f45-9708-019B960494DF}">
-                  <a14:hiddenLine xmlns:a14="http://schemas.microsoft.com/office/drawing/2010/main" xmlns="" w="9525">
+                  <a14:hiddenLine xmlns="" xmlns:a14="http://schemas.microsoft.com/office/drawing/2010/main" w="9525">
                     <a:solidFill>
                       <a:srgbClr val="000000"/>
                     </a:solidFill>
@@ -11115,7 +11115,7 @@
               </a:ln>
               <a:extLst>
                 <a:ext uri="{91240B29-F687-4f45-9708-019B960494DF}">
-                  <a14:hiddenLine xmlns:a14="http://schemas.microsoft.com/office/drawing/2010/main" xmlns="" w="9525">
+                  <a14:hiddenLine xmlns="" xmlns:a14="http://schemas.microsoft.com/office/drawing/2010/main" w="9525">
                     <a:solidFill>
                       <a:srgbClr val="000000"/>
                     </a:solidFill>
@@ -11177,7 +11177,7 @@
               </a:ln>
               <a:extLst>
                 <a:ext uri="{91240B29-F687-4f45-9708-019B960494DF}">
-                  <a14:hiddenLine xmlns:a14="http://schemas.microsoft.com/office/drawing/2010/main" xmlns="" w="9525">
+                  <a14:hiddenLine xmlns="" xmlns:a14="http://schemas.microsoft.com/office/drawing/2010/main" w="9525">
                     <a:solidFill>
                       <a:srgbClr val="000000"/>
                     </a:solidFill>
@@ -11267,7 +11267,7 @@
               </a:ln>
               <a:extLst>
                 <a:ext uri="{91240B29-F687-4f45-9708-019B960494DF}">
-                  <a14:hiddenLine xmlns:a14="http://schemas.microsoft.com/office/drawing/2010/main" xmlns="" w="9525">
+                  <a14:hiddenLine xmlns="" xmlns:a14="http://schemas.microsoft.com/office/drawing/2010/main" w="9525">
                     <a:solidFill>
                       <a:srgbClr val="000000"/>
                     </a:solidFill>
@@ -11357,7 +11357,7 @@
               </a:ln>
               <a:extLst>
                 <a:ext uri="{91240B29-F687-4f45-9708-019B960494DF}">
-                  <a14:hiddenLine xmlns:a14="http://schemas.microsoft.com/office/drawing/2010/main" xmlns="" w="9525">
+                  <a14:hiddenLine xmlns="" xmlns:a14="http://schemas.microsoft.com/office/drawing/2010/main" w="9525">
                     <a:solidFill>
                       <a:srgbClr val="000000"/>
                     </a:solidFill>
@@ -11422,7 +11422,7 @@
               </a:ln>
               <a:extLst>
                 <a:ext uri="{91240B29-F687-4f45-9708-019B960494DF}">
-                  <a14:hiddenLine xmlns:a14="http://schemas.microsoft.com/office/drawing/2010/main" xmlns="" w="9525">
+                  <a14:hiddenLine xmlns="" xmlns:a14="http://schemas.microsoft.com/office/drawing/2010/main" w="9525">
                     <a:solidFill>
                       <a:srgbClr val="000000"/>
                     </a:solidFill>
@@ -11542,7 +11542,7 @@
               </a:ln>
               <a:extLst>
                 <a:ext uri="{91240B29-F687-4f45-9708-019B960494DF}">
-                  <a14:hiddenLine xmlns:a14="http://schemas.microsoft.com/office/drawing/2010/main" xmlns="" w="9525">
+                  <a14:hiddenLine xmlns="" xmlns:a14="http://schemas.microsoft.com/office/drawing/2010/main" w="9525">
                     <a:solidFill>
                       <a:srgbClr val="000000"/>
                     </a:solidFill>
@@ -11623,7 +11623,7 @@
               </a:ln>
               <a:extLst>
                 <a:ext uri="{91240B29-F687-4f45-9708-019B960494DF}">
-                  <a14:hiddenLine xmlns:a14="http://schemas.microsoft.com/office/drawing/2010/main" xmlns="" w="9525">
+                  <a14:hiddenLine xmlns="" xmlns:a14="http://schemas.microsoft.com/office/drawing/2010/main" w="9525">
                     <a:solidFill>
                       <a:srgbClr val="000000"/>
                     </a:solidFill>
@@ -11738,7 +11738,7 @@
               </a:ln>
               <a:extLst>
                 <a:ext uri="{91240B29-F687-4f45-9708-019B960494DF}">
-                  <a14:hiddenLine xmlns:a14="http://schemas.microsoft.com/office/drawing/2010/main" xmlns="" w="9525">
+                  <a14:hiddenLine xmlns="" xmlns:a14="http://schemas.microsoft.com/office/drawing/2010/main" w="9525">
                     <a:solidFill>
                       <a:srgbClr val="000000"/>
                     </a:solidFill>
@@ -11828,7 +11828,7 @@
               </a:ln>
               <a:extLst>
                 <a:ext uri="{91240B29-F687-4f45-9708-019B960494DF}">
-                  <a14:hiddenLine xmlns:a14="http://schemas.microsoft.com/office/drawing/2010/main" xmlns="" w="9525">
+                  <a14:hiddenLine xmlns="" xmlns:a14="http://schemas.microsoft.com/office/drawing/2010/main" w="9525">
                     <a:solidFill>
                       <a:srgbClr val="000000"/>
                     </a:solidFill>
@@ -11893,7 +11893,7 @@
               </a:ln>
               <a:extLst>
                 <a:ext uri="{91240B29-F687-4f45-9708-019B960494DF}">
-                  <a14:hiddenLine xmlns:a14="http://schemas.microsoft.com/office/drawing/2010/main" xmlns="" w="9525">
+                  <a14:hiddenLine xmlns="" xmlns:a14="http://schemas.microsoft.com/office/drawing/2010/main" w="9525">
                     <a:solidFill>
                       <a:srgbClr val="000000"/>
                     </a:solidFill>
@@ -11983,7 +11983,7 @@
               </a:ln>
               <a:extLst>
                 <a:ext uri="{91240B29-F687-4f45-9708-019B960494DF}">
-                  <a14:hiddenLine xmlns:a14="http://schemas.microsoft.com/office/drawing/2010/main" xmlns="" w="9525">
+                  <a14:hiddenLine xmlns="" xmlns:a14="http://schemas.microsoft.com/office/drawing/2010/main" w="9525">
                     <a:solidFill>
                       <a:srgbClr val="000000"/>
                     </a:solidFill>
@@ -12051,7 +12051,7 @@
               </a:ln>
               <a:extLst>
                 <a:ext uri="{91240B29-F687-4f45-9708-019B960494DF}">
-                  <a14:hiddenLine xmlns:a14="http://schemas.microsoft.com/office/drawing/2010/main" xmlns="" w="9525">
+                  <a14:hiddenLine xmlns="" xmlns:a14="http://schemas.microsoft.com/office/drawing/2010/main" w="9525">
                     <a:solidFill>
                       <a:srgbClr val="000000"/>
                     </a:solidFill>
@@ -12141,7 +12141,7 @@
               </a:ln>
               <a:extLst>
                 <a:ext uri="{91240B29-F687-4f45-9708-019B960494DF}">
-                  <a14:hiddenLine xmlns:a14="http://schemas.microsoft.com/office/drawing/2010/main" xmlns="" w="9525">
+                  <a14:hiddenLine xmlns="" xmlns:a14="http://schemas.microsoft.com/office/drawing/2010/main" w="9525">
                     <a:solidFill>
                       <a:srgbClr val="000000"/>
                     </a:solidFill>
@@ -12209,7 +12209,7 @@
               </a:ln>
               <a:extLst>
                 <a:ext uri="{91240B29-F687-4f45-9708-019B960494DF}">
-                  <a14:hiddenLine xmlns:a14="http://schemas.microsoft.com/office/drawing/2010/main" xmlns="" w="9525">
+                  <a14:hiddenLine xmlns="" xmlns:a14="http://schemas.microsoft.com/office/drawing/2010/main" w="9525">
                     <a:solidFill>
                       <a:srgbClr val="000000"/>
                     </a:solidFill>
@@ -12299,7 +12299,7 @@
               </a:ln>
               <a:extLst>
                 <a:ext uri="{91240B29-F687-4f45-9708-019B960494DF}">
-                  <a14:hiddenLine xmlns:a14="http://schemas.microsoft.com/office/drawing/2010/main" xmlns="" w="9525">
+                  <a14:hiddenLine xmlns="" xmlns:a14="http://schemas.microsoft.com/office/drawing/2010/main" w="9525">
                     <a:solidFill>
                       <a:srgbClr val="000000"/>
                     </a:solidFill>
@@ -12333,7 +12333,7 @@
               </a:ln>
               <a:extLst>
                 <a:ext uri="{91240B29-F687-4f45-9708-019B960494DF}">
-                  <a14:hiddenLine xmlns:a14="http://schemas.microsoft.com/office/drawing/2010/main" xmlns="" w="9525">
+                  <a14:hiddenLine xmlns="" xmlns:a14="http://schemas.microsoft.com/office/drawing/2010/main" w="9525">
                     <a:solidFill>
                       <a:srgbClr val="000000"/>
                     </a:solidFill>
@@ -12473,7 +12473,7 @@
           <a:p>
             <a:fld id="{120E912D-2605-2F45-98DD-DEE15AE0AFF9}" type="datetime1">
               <a:rPr lang="en-US" smtClean="0"/>
-              <a:t>8/27/25</a:t>
+              <a:t>10/7/25</a:t>
             </a:fld>
             <a:endParaRPr lang="en-US"/>
           </a:p>
@@ -13029,8 +13029,8 @@
           </a:p>
         </p:txBody>
       </p:sp>
-      <mc:AlternateContent xmlns:mc="http://schemas.openxmlformats.org/markup-compatibility/2006">
-        <mc:Choice xmlns:a14="http://schemas.microsoft.com/office/drawing/2010/main" Requires="a14">
+      <mc:AlternateContent xmlns:mc="http://schemas.openxmlformats.org/markup-compatibility/2006" xmlns:a14="http://schemas.microsoft.com/office/drawing/2010/main">
+        <mc:Choice Requires="a14">
           <p:sp>
             <p:nvSpPr>
               <p:cNvPr id="3" name="Content Placeholder 2"/>
@@ -13482,7 +13482,7 @@
             </p:txBody>
           </p:sp>
         </mc:Choice>
-        <mc:Fallback>
+        <mc:Fallback xmlns="">
           <p:sp>
             <p:nvSpPr>
               <p:cNvPr id="3" name="Content Placeholder 2"/>
@@ -13578,8 +13578,8 @@
           </a:p>
         </p:txBody>
       </p:sp>
-      <mc:AlternateContent xmlns:mc="http://schemas.openxmlformats.org/markup-compatibility/2006">
-        <mc:Choice xmlns:a14="http://schemas.microsoft.com/office/drawing/2010/main" Requires="a14">
+      <mc:AlternateContent xmlns:mc="http://schemas.openxmlformats.org/markup-compatibility/2006" xmlns:a14="http://schemas.microsoft.com/office/drawing/2010/main">
+        <mc:Choice Requires="a14">
           <p:sp>
             <p:nvSpPr>
               <p:cNvPr id="3" name="Content Placeholder 2"/>
@@ -14544,7 +14544,7 @@
             </p:txBody>
           </p:sp>
         </mc:Choice>
-        <mc:Fallback>
+        <mc:Fallback xmlns="">
           <p:sp>
             <p:nvSpPr>
               <p:cNvPr id="3" name="Content Placeholder 2"/>
@@ -14699,8 +14699,8 @@
           </a:p>
         </p:txBody>
       </p:sp>
-      <mc:AlternateContent xmlns:mc="http://schemas.openxmlformats.org/markup-compatibility/2006">
-        <mc:Choice xmlns:a14="http://schemas.microsoft.com/office/drawing/2010/main" Requires="a14">
+      <mc:AlternateContent xmlns:mc="http://schemas.openxmlformats.org/markup-compatibility/2006" xmlns:a14="http://schemas.microsoft.com/office/drawing/2010/main">
+        <mc:Choice Requires="a14">
           <p:sp>
             <p:nvSpPr>
               <p:cNvPr id="3" name="Content Placeholder 2"/>
@@ -14959,7 +14959,7 @@
             </p:txBody>
           </p:sp>
         </mc:Choice>
-        <mc:Fallback>
+        <mc:Fallback xmlns="">
           <p:sp>
             <p:nvSpPr>
               <p:cNvPr id="3" name="Content Placeholder 2"/>
@@ -15219,8 +15219,8 @@
           </a:p>
         </p:txBody>
       </p:sp>
-      <mc:AlternateContent xmlns:mc="http://schemas.openxmlformats.org/markup-compatibility/2006">
-        <mc:Choice xmlns:a14="http://schemas.microsoft.com/office/drawing/2010/main" Requires="a14">
+      <mc:AlternateContent xmlns:mc="http://schemas.openxmlformats.org/markup-compatibility/2006" xmlns:a14="http://schemas.microsoft.com/office/drawing/2010/main">
+        <mc:Choice Requires="a14">
           <p:sp>
             <p:nvSpPr>
               <p:cNvPr id="6" name="Content Placeholder 2">
@@ -15592,7 +15592,7 @@
             </p:txBody>
           </p:sp>
         </mc:Choice>
-        <mc:Fallback>
+        <mc:Fallback xmlns="">
           <p:sp>
             <p:nvSpPr>
               <p:cNvPr id="6" name="Content Placeholder 2">
@@ -17885,8 +17885,8 @@
           </a:p>
         </p:txBody>
       </p:sp>
-      <mc:AlternateContent xmlns:mc="http://schemas.openxmlformats.org/markup-compatibility/2006">
-        <mc:Choice xmlns:a14="http://schemas.microsoft.com/office/drawing/2010/main" Requires="a14">
+      <mc:AlternateContent xmlns:mc="http://schemas.openxmlformats.org/markup-compatibility/2006" xmlns:a14="http://schemas.microsoft.com/office/drawing/2010/main">
+        <mc:Choice Requires="a14">
           <p:sp>
             <p:nvSpPr>
               <p:cNvPr id="3" name="Content Placeholder 2">
@@ -18151,7 +18151,7 @@
             </p:txBody>
           </p:sp>
         </mc:Choice>
-        <mc:Fallback>
+        <mc:Fallback xmlns="">
           <p:sp>
             <p:nvSpPr>
               <p:cNvPr id="3" name="Content Placeholder 2">
@@ -18866,8 +18866,8 @@
           </a:p>
         </p:txBody>
       </p:sp>
-      <mc:AlternateContent xmlns:mc="http://schemas.openxmlformats.org/markup-compatibility/2006">
-        <mc:Choice xmlns:a14="http://schemas.microsoft.com/office/drawing/2010/main" Requires="a14">
+      <mc:AlternateContent xmlns:mc="http://schemas.openxmlformats.org/markup-compatibility/2006" xmlns:a14="http://schemas.microsoft.com/office/drawing/2010/main">
+        <mc:Choice Requires="a14">
           <p:sp>
             <p:nvSpPr>
               <p:cNvPr id="3" name="Content Placeholder 2"/>
@@ -19096,7 +19096,7 @@
             </p:txBody>
           </p:sp>
         </mc:Choice>
-        <mc:Fallback>
+        <mc:Fallback xmlns="">
           <p:sp>
             <p:nvSpPr>
               <p:cNvPr id="3" name="Content Placeholder 2"/>
@@ -19134,8 +19134,8 @@
           </p:sp>
         </mc:Fallback>
       </mc:AlternateContent>
-      <mc:AlternateContent xmlns:mc="http://schemas.openxmlformats.org/markup-compatibility/2006">
-        <mc:Choice xmlns:a14="http://schemas.microsoft.com/office/drawing/2010/main" Requires="a14">
+      <mc:AlternateContent xmlns:mc="http://schemas.openxmlformats.org/markup-compatibility/2006" xmlns:a14="http://schemas.microsoft.com/office/drawing/2010/main">
+        <mc:Choice Requires="a14">
           <p:sp>
             <p:nvSpPr>
               <p:cNvPr id="4" name="Content Placeholder 2">
@@ -19451,7 +19451,7 @@
             </p:txBody>
           </p:sp>
         </mc:Choice>
-        <mc:Fallback>
+        <mc:Fallback xmlns="">
           <p:sp>
             <p:nvSpPr>
               <p:cNvPr id="4" name="Content Placeholder 2">
@@ -19631,8 +19631,8 @@
           </a:p>
         </p:txBody>
       </p:sp>
-      <mc:AlternateContent xmlns:mc="http://schemas.openxmlformats.org/markup-compatibility/2006">
-        <mc:Choice xmlns:a14="http://schemas.microsoft.com/office/drawing/2010/main" Requires="a14">
+      <mc:AlternateContent xmlns:mc="http://schemas.openxmlformats.org/markup-compatibility/2006" xmlns:a14="http://schemas.microsoft.com/office/drawing/2010/main">
+        <mc:Choice Requires="a14">
           <p:sp>
             <p:nvSpPr>
               <p:cNvPr id="4" name="Content Placeholder 2">
@@ -20350,7 +20350,7 @@
             </p:txBody>
           </p:sp>
         </mc:Choice>
-        <mc:Fallback>
+        <mc:Fallback xmlns="">
           <p:sp>
             <p:nvSpPr>
               <p:cNvPr id="4" name="Content Placeholder 2">
@@ -20458,8 +20458,8 @@
           </a:p>
         </p:txBody>
       </p:sp>
-      <mc:AlternateContent xmlns:mc="http://schemas.openxmlformats.org/markup-compatibility/2006">
-        <mc:Choice xmlns:a14="http://schemas.microsoft.com/office/drawing/2010/main" Requires="a14">
+      <mc:AlternateContent xmlns:mc="http://schemas.openxmlformats.org/markup-compatibility/2006" xmlns:a14="http://schemas.microsoft.com/office/drawing/2010/main">
+        <mc:Choice Requires="a14">
           <p:sp>
             <p:nvSpPr>
               <p:cNvPr id="3" name="Content Placeholder 2"/>
@@ -20734,7 +20734,7 @@
             </p:txBody>
           </p:sp>
         </mc:Choice>
-        <mc:Fallback>
+        <mc:Fallback xmlns="">
           <p:sp>
             <p:nvSpPr>
               <p:cNvPr id="3" name="Content Placeholder 2"/>
@@ -20772,8 +20772,8 @@
           </p:sp>
         </mc:Fallback>
       </mc:AlternateContent>
-      <mc:AlternateContent xmlns:mc="http://schemas.openxmlformats.org/markup-compatibility/2006">
-        <mc:Choice xmlns:a14="http://schemas.microsoft.com/office/drawing/2010/main" Requires="a14">
+      <mc:AlternateContent xmlns:mc="http://schemas.openxmlformats.org/markup-compatibility/2006" xmlns:a14="http://schemas.microsoft.com/office/drawing/2010/main">
+        <mc:Choice Requires="a14">
           <p:sp>
             <p:nvSpPr>
               <p:cNvPr id="4" name="Content Placeholder 2">
@@ -21182,7 +21182,7 @@
             </p:txBody>
           </p:sp>
         </mc:Choice>
-        <mc:Fallback>
+        <mc:Fallback xmlns="">
           <p:sp>
             <p:nvSpPr>
               <p:cNvPr id="4" name="Content Placeholder 2">
